--- a/Falcon-Portfolio-Portal-DIB-Management-Executive.pptx
+++ b/Falcon-Portfolio-Portal-DIB-Management-Executive.pptx
@@ -449,7 +449,7 @@
             <a:gdLst/>
             <a:ahLst/>
             <a:cxnLst/>
-            <a:rect l="0" t="0" r="r" b="b"/>
+            <a:rect l="l" t="t" r="r" b="b"/>
             <a:pathLst>
               <a:path w="640" h="640">
                 <a:moveTo>
@@ -526,7 +526,7 @@
             <a:gdLst/>
             <a:ahLst/>
             <a:cxnLst/>
-            <a:rect l="0" t="0" r="r" b="b"/>
+            <a:rect l="l" t="t" r="r" b="b"/>
             <a:pathLst>
               <a:path w="640" h="640">
                 <a:moveTo>
@@ -2288,7 +2288,7 @@
             <a:gdLst/>
             <a:ahLst/>
             <a:cxnLst/>
-            <a:rect l="0" t="0" r="r" b="b"/>
+            <a:rect l="l" t="t" r="r" b="b"/>
             <a:pathLst>
               <a:path w="640" h="640">
                 <a:moveTo>
@@ -2365,7 +2365,7 @@
             <a:gdLst/>
             <a:ahLst/>
             <a:cxnLst/>
-            <a:rect l="0" t="0" r="r" b="b"/>
+            <a:rect l="l" t="t" r="r" b="b"/>
             <a:pathLst>
               <a:path w="640" h="640">
                 <a:moveTo>
@@ -2738,7 +2738,7 @@
             <a:gdLst/>
             <a:ahLst/>
             <a:cxnLst/>
-            <a:rect l="0" t="0" r="r" b="b"/>
+            <a:rect l="l" t="t" r="r" b="b"/>
             <a:pathLst>
               <a:path w="640" h="640">
                 <a:moveTo>
@@ -2801,7 +2801,7 @@
             <a:gdLst/>
             <a:ahLst/>
             <a:cxnLst/>
-            <a:rect l="0" t="0" r="r" b="b"/>
+            <a:rect l="l" t="t" r="r" b="b"/>
             <a:pathLst>
               <a:path w="100" h="100" fill="none">
                 <a:moveTo>
@@ -3287,7 +3287,7 @@
             <a:gdLst/>
             <a:ahLst/>
             <a:cxnLst/>
-            <a:rect l="0" t="0" r="r" b="b"/>
+            <a:rect l="l" t="t" r="r" b="b"/>
             <a:pathLst>
               <a:path w="100" h="100" fill="none">
                 <a:moveTo>
@@ -3468,8 +3468,8 @@
           <a:prstGeom prst="blockArc">
             <a:avLst>
               <a:gd name="adj1" fmla="val 10800000"/>
+              <a:gd name="adj2" fmla="val 0"/>
               <a:gd name="adj3" fmla="val 14000"/>
-              <a:gd name="adj2" fmla="val 0"/>
             </a:avLst>
           </a:prstGeom>
           <a:solidFill>
@@ -4121,7 +4121,7 @@
             <a:gdLst/>
             <a:ahLst/>
             <a:cxnLst/>
-            <a:rect l="0" t="0" r="r" b="b"/>
+            <a:rect l="l" t="t" r="r" b="b"/>
             <a:pathLst>
               <a:path w="640" h="640">
                 <a:moveTo>
@@ -4191,7 +4191,7 @@
             <a:gdLst/>
             <a:ahLst/>
             <a:cxnLst/>
-            <a:rect l="0" t="0" r="r" b="b"/>
+            <a:rect l="l" t="t" r="r" b="b"/>
             <a:pathLst>
               <a:path w="640" h="640">
                 <a:moveTo>
@@ -4479,9 +4479,7 @@
             <a:r>
               <a:rPr lang="en-US" sz="650" b="1" dirty="0">
                 <a:solidFill>
-                  <a:srgbClr val="FFFFFF">
-                    <a:alpha val="75000"/>
-                  </a:srgbClr>
+                  <a:srgbClr val="C2D6CD"/>
                 </a:solidFill>
                 <a:latin typeface="Segoe UI"/>
                 <a:cs typeface="Segoe UI"/>
@@ -4523,9 +4521,7 @@
             <a:r>
               <a:rPr lang="en-US" sz="650" b="1" dirty="0">
                 <a:solidFill>
-                  <a:srgbClr val="FFFFFF">
-                    <a:alpha val="75000"/>
-                  </a:srgbClr>
+                  <a:srgbClr val="C2D6CD"/>
                 </a:solidFill>
                 <a:latin typeface="Segoe UI"/>
                 <a:cs typeface="Segoe UI"/>
@@ -4567,9 +4563,7 @@
             <a:r>
               <a:rPr lang="en-US" sz="650" b="1" dirty="0">
                 <a:solidFill>
-                  <a:srgbClr val="FFFFFF">
-                    <a:alpha val="75000"/>
-                  </a:srgbClr>
+                  <a:srgbClr val="C2D6CD"/>
                 </a:solidFill>
                 <a:latin typeface="Segoe UI"/>
                 <a:cs typeface="Segoe UI"/>
@@ -8367,7 +8361,7 @@
             <a:gdLst/>
             <a:ahLst/>
             <a:cxnLst/>
-            <a:rect l="0" t="0" r="r" b="b"/>
+            <a:rect l="l" t="t" r="r" b="b"/>
             <a:pathLst>
               <a:path w="100" h="100" fill="none">
                 <a:moveTo>
@@ -8609,7 +8603,7 @@
             <a:gdLst/>
             <a:ahLst/>
             <a:cxnLst/>
-            <a:rect l="0" t="0" r="r" b="b"/>
+            <a:rect l="l" t="t" r="r" b="b"/>
             <a:pathLst>
               <a:path w="640" h="640">
                 <a:moveTo>
@@ -8672,7 +8666,7 @@
             <a:gdLst/>
             <a:ahLst/>
             <a:cxnLst/>
-            <a:rect l="0" t="0" r="r" b="b"/>
+            <a:rect l="l" t="t" r="r" b="b"/>
             <a:pathLst>
               <a:path w="100" h="100" fill="none">
                 <a:moveTo>
@@ -9955,7 +9949,7 @@
             <a:gdLst/>
             <a:ahLst/>
             <a:cxnLst/>
-            <a:rect l="0" t="0" r="r" b="b"/>
+            <a:rect l="l" t="t" r="r" b="b"/>
             <a:pathLst>
               <a:path w="640" h="640">
                 <a:moveTo>
@@ -10032,7 +10026,7 @@
             <a:gdLst/>
             <a:ahLst/>
             <a:cxnLst/>
-            <a:rect l="0" t="0" r="r" b="b"/>
+            <a:rect l="l" t="t" r="r" b="b"/>
             <a:pathLst>
               <a:path w="640" h="640">
                 <a:moveTo>
@@ -10574,7 +10568,7 @@
             <a:gdLst/>
             <a:ahLst/>
             <a:cxnLst/>
-            <a:rect l="0" t="0" r="r" b="b"/>
+            <a:rect l="l" t="t" r="r" b="b"/>
             <a:pathLst>
               <a:path w="640" h="640">
                 <a:moveTo>
@@ -10898,7 +10892,7 @@
             <a:gdLst/>
             <a:ahLst/>
             <a:cxnLst/>
-            <a:rect l="0" t="0" r="r" b="b"/>
+            <a:rect l="l" t="t" r="r" b="b"/>
             <a:pathLst>
               <a:path w="1000" h="1000" fill="none">
                 <a:moveTo>
@@ -11416,7 +11410,7 @@
             <a:gdLst/>
             <a:ahLst/>
             <a:cxnLst/>
-            <a:rect l="0" t="0" r="r" b="b"/>
+            <a:rect l="l" t="t" r="r" b="b"/>
             <a:pathLst>
               <a:path w="640" h="640">
                 <a:moveTo>
@@ -12034,7 +12028,7 @@
             <a:gdLst/>
             <a:ahLst/>
             <a:cxnLst/>
-            <a:rect l="0" t="0" r="r" b="b"/>
+            <a:rect l="l" t="t" r="r" b="b"/>
             <a:pathLst>
               <a:path w="640" h="640">
                 <a:moveTo>
@@ -12606,7 +12600,7 @@
             <a:gdLst/>
             <a:ahLst/>
             <a:cxnLst/>
-            <a:rect l="0" t="0" r="r" b="b"/>
+            <a:rect l="l" t="t" r="r" b="b"/>
             <a:pathLst>
               <a:path w="640" h="640">
                 <a:moveTo>
@@ -13243,7 +13237,7 @@
             <a:gdLst/>
             <a:ahLst/>
             <a:cxnLst/>
-            <a:rect l="0" t="0" r="r" b="b"/>
+            <a:rect l="l" t="t" r="r" b="b"/>
             <a:pathLst>
               <a:path w="640" h="640">
                 <a:moveTo>
@@ -13957,7 +13951,7 @@
             <a:gdLst/>
             <a:ahLst/>
             <a:cxnLst/>
-            <a:rect l="0" t="0" r="r" b="b"/>
+            <a:rect l="l" t="t" r="r" b="b"/>
             <a:pathLst>
               <a:path w="640" h="640">
                 <a:moveTo>
@@ -14529,7 +14523,7 @@
             <a:gdLst/>
             <a:ahLst/>
             <a:cxnLst/>
-            <a:rect l="0" t="0" r="r" b="b"/>
+            <a:rect l="l" t="t" r="r" b="b"/>
             <a:pathLst>
               <a:path w="640" h="640">
                 <a:moveTo>
@@ -15680,7 +15674,7 @@
             <a:gdLst/>
             <a:ahLst/>
             <a:cxnLst/>
-            <a:rect l="0" t="0" r="r" b="b"/>
+            <a:rect l="l" t="t" r="r" b="b"/>
             <a:pathLst>
               <a:path w="640" h="640">
                 <a:moveTo>
@@ -15757,7 +15751,7 @@
             <a:gdLst/>
             <a:ahLst/>
             <a:cxnLst/>
-            <a:rect l="0" t="0" r="r" b="b"/>
+            <a:rect l="l" t="t" r="r" b="b"/>
             <a:pathLst>
               <a:path w="640" h="640">
                 <a:moveTo>
@@ -16193,7 +16187,7 @@
             <a:gdLst/>
             <a:ahLst/>
             <a:cxnLst/>
-            <a:rect l="0" t="0" r="r" b="b"/>
+            <a:rect l="l" t="t" r="r" b="b"/>
             <a:pathLst>
               <a:path w="640" h="640">
                 <a:moveTo>
@@ -16263,7 +16257,7 @@
             <a:gdLst/>
             <a:ahLst/>
             <a:cxnLst/>
-            <a:rect l="0" t="0" r="r" b="b"/>
+            <a:rect l="l" t="t" r="r" b="b"/>
             <a:pathLst>
               <a:path w="640" h="640">
                 <a:moveTo>
@@ -17356,7 +17350,7 @@
             <a:gdLst/>
             <a:ahLst/>
             <a:cxnLst/>
-            <a:rect l="0" t="0" r="r" b="b"/>
+            <a:rect l="l" t="t" r="r" b="b"/>
             <a:pathLst>
               <a:path w="640" h="640">
                 <a:moveTo>
@@ -17419,7 +17413,7 @@
             <a:gdLst/>
             <a:ahLst/>
             <a:cxnLst/>
-            <a:rect l="0" t="0" r="r" b="b"/>
+            <a:rect l="l" t="t" r="r" b="b"/>
             <a:pathLst>
               <a:path w="100" h="100" fill="none">
                 <a:moveTo>
@@ -18789,8 +18783,8 @@
           </a:xfrm>
           <a:prstGeom prst="round2SameRect">
             <a:avLst>
+              <a:gd name="adj1" fmla="val 50000"/>
               <a:gd name="adj2" fmla="val 0"/>
-              <a:gd name="adj1" fmla="val 50000"/>
             </a:avLst>
           </a:prstGeom>
           <a:solidFill>
@@ -19424,8 +19418,8 @@
           <a:prstGeom prst="blockArc">
             <a:avLst>
               <a:gd name="adj1" fmla="val 10800000"/>
+              <a:gd name="adj2" fmla="val 0"/>
               <a:gd name="adj3" fmla="val 14000"/>
-              <a:gd name="adj2" fmla="val 0"/>
             </a:avLst>
           </a:prstGeom>
           <a:solidFill>
@@ -20145,7 +20139,7 @@
             <a:gdLst/>
             <a:ahLst/>
             <a:cxnLst/>
-            <a:rect l="0" t="0" r="r" b="b"/>
+            <a:rect l="l" t="t" r="r" b="b"/>
             <a:pathLst>
               <a:path w="100" h="100" fill="none">
                 <a:moveTo>
